--- a/AR_Diet_Gemini_Update.pptx
+++ b/AR_Diet_Gemini_Update.pptx
@@ -5,7 +5,7 @@
     <p:sldMasterId id="2147483648" r:id="rId1"/>
   </p:sldMasterIdLst>
   <p:notesMasterIdLst>
-    <p:notesMasterId r:id="rId11"/>
+    <p:notesMasterId r:id="rId12"/>
   </p:notesMasterIdLst>
   <p:sldIdLst>
     <p:sldId id="256" r:id="rId2"/>
@@ -14,9 +14,10 @@
     <p:sldId id="259" r:id="rId5"/>
     <p:sldId id="260" r:id="rId6"/>
     <p:sldId id="261" r:id="rId7"/>
-    <p:sldId id="264" r:id="rId8"/>
-    <p:sldId id="262" r:id="rId9"/>
-    <p:sldId id="263" r:id="rId10"/>
+    <p:sldId id="300" r:id="rId8"/>
+    <p:sldId id="264" r:id="rId9"/>
+    <p:sldId id="262" r:id="rId10"/>
+    <p:sldId id="263" r:id="rId11"/>
   </p:sldIdLst>
   <p:sldSz cx="12192000" cy="6858000"/>
   <p:notesSz cx="6858000" cy="12192000"/>
@@ -814,7 +815,7 @@
           <a:p>
             <a:fld id="{F7021451-1387-4CA6-816F-3879F97B5CBC}" type="slidenum">
               <a:rPr lang="en-US"/>
-              <a:t>8</a:t>
+              <a:t>9</a:t>
             </a:fld>
             <a:endParaRPr lang="en-US"/>
           </a:p>
@@ -898,7 +899,7 @@
           <a:p>
             <a:fld id="{F7021451-1387-4CA6-816F-3879F97B5CBC}" type="slidenum">
               <a:rPr lang="en-US"/>
-              <a:t>9</a:t>
+              <a:t>10</a:t>
             </a:fld>
             <a:endParaRPr lang="en-US"/>
           </a:p>
@@ -1345,17 +1346,6 @@
             <a:pPr marL="0" indent="0">
               <a:buNone/>
             </a:pPr>
-            <a:r>
-              <a:rPr lang="en-US" sz="2200" dirty="0">
-                <a:solidFill>
-                  <a:srgbClr val="AEB9CC"/>
-                </a:solidFill>
-                <a:latin typeface="Segoe UI" pitchFamily="34" charset="0"/>
-                <a:ea typeface="Segoe UI" pitchFamily="34" charset="-122"/>
-                <a:cs typeface="Segoe UI" pitchFamily="34" charset="-120"/>
-              </a:rPr>
-              <a:t>Food Recognition &amp; Nutrition Estimation</a:t>
-            </a:r>
             <a:endParaRPr lang="en-US" sz="2200" dirty="0"/>
           </a:p>
         </p:txBody>
@@ -1368,7 +1358,7 @@
         </p:nvSpPr>
         <p:spPr>
           <a:xfrm>
-            <a:off x="731520" y="3429000"/>
+            <a:off x="762000" y="2651760"/>
             <a:ext cx="10058400" cy="457200"/>
           </a:xfrm>
           <a:prstGeom prst="rect">
@@ -1393,9 +1383,179 @@
                 <a:ea typeface="Segoe UI" pitchFamily="34" charset="-122"/>
                 <a:cs typeface="Segoe UI" pitchFamily="34" charset="-120"/>
               </a:rPr>
-              <a:t>Integrating Google Gemini multimodal AI into the AR scan pipeline</a:t>
+              <a:t>Privacy-first update: fully on-device AI food recognition</a:t>
             </a:r>
             <a:endParaRPr lang="en-US" sz="1300" dirty="0"/>
+          </a:p>
+        </p:txBody>
+      </p:sp>
+    </p:spTree>
+  </p:cSld>
+  <p:clrMapOvr>
+    <a:masterClrMapping/>
+  </p:clrMapOvr>
+</p:sld>
+</file>
+
+<file path=ppt/slides/slide10.xml><?xml version="1.0" encoding="utf-8"?>
+<p:sld xmlns:a="http://schemas.openxmlformats.org/drawingml/2006/main" xmlns:r="http://schemas.openxmlformats.org/officeDocument/2006/relationships" xmlns:p="http://schemas.openxmlformats.org/presentationml/2006/main">
+  <p:cSld name="Slide 8">
+    <p:bg>
+      <p:bgPr>
+        <a:solidFill>
+          <a:srgbClr val="0F2440"/>
+        </a:solidFill>
+        <a:effectLst/>
+      </p:bgPr>
+    </p:bg>
+    <p:spTree>
+      <p:nvGrpSpPr>
+        <p:cNvPr id="1" name=""/>
+        <p:cNvGrpSpPr/>
+        <p:nvPr/>
+      </p:nvGrpSpPr>
+      <p:grpSpPr>
+        <a:xfrm>
+          <a:off x="0" y="0"/>
+          <a:ext cx="0" cy="0"/>
+          <a:chOff x="0" y="0"/>
+          <a:chExt cx="0" cy="0"/>
+        </a:xfrm>
+      </p:grpSpPr>
+      <p:sp>
+        <p:nvSpPr>
+          <p:cNvPr id="3" name="Text 1"/>
+          <p:cNvSpPr/>
+          <p:nvPr/>
+        </p:nvSpPr>
+        <p:spPr>
+          <a:xfrm>
+            <a:off x="731520" y="1371600"/>
+            <a:ext cx="10058400" cy="365760"/>
+          </a:xfrm>
+          <a:prstGeom prst="rect">
+            <a:avLst/>
+          </a:prstGeom>
+          <a:noFill/>
+          <a:ln/>
+        </p:spPr>
+        <p:txBody>
+          <a:bodyPr wrap="square" rtlCol="0" anchor="ctr"/>
+          <a:lstStyle/>
+          <a:p>
+            <a:pPr marL="0" indent="0">
+              <a:buNone/>
+            </a:pPr>
+            <a:r>
+              <a:rPr lang="en-US" sz="1400" b="1" kern="0" spc="300" dirty="0">
+                <a:solidFill>
+                  <a:srgbClr val="12B5A5"/>
+                </a:solidFill>
+                <a:latin typeface="Segoe UI" pitchFamily="34" charset="0"/>
+                <a:ea typeface="Segoe UI" pitchFamily="34" charset="-122"/>
+                <a:cs typeface="Segoe UI" pitchFamily="34" charset="-120"/>
+              </a:rPr>
+              <a:t>Summary</a:t>
+            </a:r>
+            <a:endParaRPr lang="en-US" sz="1400" dirty="0"/>
+          </a:p>
+        </p:txBody>
+      </p:sp>
+      <p:sp>
+        <p:nvSpPr>
+          <p:cNvPr id="4" name="Text 2"/>
+          <p:cNvSpPr/>
+          <p:nvPr/>
+        </p:nvSpPr>
+        <p:spPr>
+          <a:xfrm>
+            <a:off x="731520" y="1828800"/>
+            <a:ext cx="10607040" cy="1188720"/>
+          </a:xfrm>
+          <a:prstGeom prst="rect">
+            <a:avLst/>
+          </a:prstGeom>
+          <a:noFill/>
+          <a:ln/>
+        </p:spPr>
+        <p:txBody>
+          <a:bodyPr wrap="square" rtlCol="0" anchor="ctr"/>
+          <a:lstStyle/>
+          <a:p>
+            <a:pPr marL="0" indent="0">
+              <a:buNone/>
+            </a:pPr>
+            <a:endParaRPr lang="en-US" sz="2600" dirty="0"/>
+          </a:p>
+        </p:txBody>
+      </p:sp>
+      <p:sp>
+        <p:nvSpPr>
+          <p:cNvPr id="5" name="Text 3"/>
+          <p:cNvSpPr/>
+          <p:nvPr/>
+        </p:nvSpPr>
+        <p:spPr>
+          <a:xfrm>
+            <a:off x="762000" y="2011680"/>
+            <a:ext cx="10698480" cy="2011680"/>
+          </a:xfrm>
+          <a:prstGeom prst="rect">
+            <a:avLst/>
+          </a:prstGeom>
+          <a:noFill/>
+          <a:ln/>
+        </p:spPr>
+        <p:txBody>
+          <a:bodyPr wrap="square" rtlCol="0" anchor="t"/>
+          <a:lstStyle/>
+          <a:p>
+            <a:pPr marL="0" indent="0">
+              <a:spcAft>
+                <a:spcPts val="1000"/>
+              </a:spcAft>
+              <a:buNone/>
+            </a:pPr>
+            <a:r>
+              <a:rPr lang="en-US" sz="1500" dirty="0">
+                <a:solidFill>
+                  <a:srgbClr val="AEB9CC"/>
+                </a:solidFill>
+                <a:latin typeface="Segoe UI" pitchFamily="34" charset="0"/>
+                <a:ea typeface="Segoe UI" pitchFamily="34" charset="-122"/>
+                <a:cs typeface="Segoe UI" pitchFamily="34" charset="-120"/>
+              </a:rPr>
+              <a:t>Scan a meal → on-device AI identifies it and counts items → offline table provides nutrition → GI + risk → AR overlay. Nothing leaves the phone. Delivered: two local TFLite models · privacy-hardened SCAN pipeline · item counting · scanned photo in details · unknown-food handling.</a:t>
+            </a:r>
+            <a:endParaRPr lang="en-US" sz="1500" dirty="0"/>
+          </a:p>
+        </p:txBody>
+      </p:sp>
+      <p:sp>
+        <p:nvSpPr>
+          <p:cNvPr id="6" name="Text 4"/>
+          <p:cNvSpPr/>
+          <p:nvPr/>
+        </p:nvSpPr>
+        <p:spPr>
+          <a:xfrm>
+            <a:off x="731520" y="6126480"/>
+            <a:ext cx="10058400" cy="365760"/>
+          </a:xfrm>
+          <a:prstGeom prst="rect">
+            <a:avLst/>
+          </a:prstGeom>
+          <a:noFill/>
+          <a:ln/>
+        </p:spPr>
+        <p:txBody>
+          <a:bodyPr wrap="square" rtlCol="0" anchor="ctr"/>
+          <a:lstStyle/>
+          <a:p>
+            <a:pPr marL="0" indent="0">
+              <a:buNone/>
+            </a:pPr>
+            <a:endParaRPr lang="en-US" sz="1100" dirty="0"/>
           </a:p>
         </p:txBody>
       </p:sp>
@@ -1520,17 +1680,6 @@
             <a:pPr marL="0" indent="0">
               <a:buNone/>
             </a:pPr>
-            <a:r>
-              <a:rPr lang="en-US" sz="1100" b="1" kern="0" spc="200" dirty="0">
-                <a:solidFill>
-                  <a:srgbClr val="12B5A5"/>
-                </a:solidFill>
-                <a:latin typeface="Segoe UI" pitchFamily="34" charset="0"/>
-                <a:ea typeface="Segoe UI" pitchFamily="34" charset="-122"/>
-                <a:cs typeface="Segoe UI" pitchFamily="34" charset="-120"/>
-              </a:rPr>
-              <a:t>THIS UPDATE</a:t>
-            </a:r>
             <a:endParaRPr lang="en-US" sz="1100" dirty="0"/>
           </a:p>
         </p:txBody>
@@ -1611,7 +1760,7 @@
                 <a:ea typeface="Segoe UI" pitchFamily="34" charset="-122"/>
                 <a:cs typeface="Segoe UI" pitchFamily="34" charset="-120"/>
               </a:rPr>
-              <a:t>Goal: enhance real-time diet monitoring with AI food recognition </a:t>
+              <a:t>Goal: privacy-preserving real-time diet monitoring with on-device AI </a:t>
             </a:r>
             <a:endParaRPr lang="en-US" sz="1500" dirty="0"/>
           </a:p>
@@ -1653,7 +1802,7 @@
                 <a:ea typeface="Segoe UI" pitchFamily="34" charset="-122"/>
                 <a:cs typeface="Segoe UI" pitchFamily="34" charset="-120"/>
               </a:rPr>
-              <a:t>Gemini food recognition — identify the specific dish from the camera photo.</a:t>
+              <a:t>On-device dish recognition — a 2,024-food TFLite classifier (Google AIY) identifies the meal locally.</a:t>
             </a:r>
             <a:endParaRPr lang="en-US" sz="1500" dirty="0"/>
           </a:p>
@@ -1674,7 +1823,7 @@
                 <a:ea typeface="Segoe UI" pitchFamily="34" charset="-122"/>
                 <a:cs typeface="Segoe UI" pitchFamily="34" charset="-120"/>
               </a:rPr>
-              <a:t>Gemini nutrition + portion estimation — grams, per-portion kcal, and per-100g macros.</a:t>
+              <a:t>On-device detection + counting — an SSD box detector finds items and counts them (e.g., 3 × apple).</a:t>
             </a:r>
             <a:endParaRPr lang="en-US" sz="1500" dirty="0"/>
           </a:p>
@@ -1695,7 +1844,7 @@
                 <a:ea typeface="Segoe UI" pitchFamily="34" charset="-122"/>
                 <a:cs typeface="Segoe UI" pitchFamily="34" charset="-120"/>
               </a:rPr>
-              <a:t>Keep USDA FoodData Central as the authoritative macro source when it has a match.</a:t>
+              <a:t>SCAN resolves nutrition from an offline table — zero network calls; USDA is used only for typed text queries (PICK).</a:t>
             </a:r>
             <a:endParaRPr lang="en-US" sz="1500" dirty="0"/>
           </a:p>
@@ -1909,7 +2058,7 @@
                 <a:ea typeface="Segoe UI" pitchFamily="34" charset="-122"/>
                 <a:cs typeface="Segoe UI" pitchFamily="34" charset="-120"/>
               </a:rPr>
-              <a:t>CV food recognition + nutrition in AR</a:t>
+              <a:t>private on-device CV + nutrition in AR</a:t>
             </a:r>
             <a:endParaRPr lang="en-US" sz="1150" dirty="0"/>
           </a:p>
@@ -2263,7 +2412,7 @@
                 <a:ea typeface="Segoe UI" pitchFamily="34" charset="-122"/>
                 <a:cs typeface="Segoe UI" pitchFamily="34" charset="-120"/>
               </a:rPr>
-              <a:t> GeminiVision service</a:t>
+              <a:t> Two local TFLite models</a:t>
             </a:r>
             <a:endParaRPr lang="en-US" sz="1400" dirty="0"/>
           </a:p>
@@ -2306,7 +2455,7 @@
                 <a:ea typeface="Segoe UI" pitchFamily="34" charset="-122"/>
                 <a:cs typeface="Segoe UI" pitchFamily="34" charset="-120"/>
               </a:rPr>
-              <a:t>src/services/GeminiVision.js</a:t>
+              <a:t>LocalFoodClassifier.js · FoodBoxDetector.js</a:t>
             </a:r>
             <a:endParaRPr lang="en-US" sz="1150" dirty="0"/>
           </a:p>
@@ -2327,7 +2476,7 @@
                 <a:ea typeface="Segoe UI" pitchFamily="34" charset="-122"/>
                 <a:cs typeface="Segoe UI" pitchFamily="34" charset="-120"/>
               </a:rPr>
-              <a:t>One structured-JSON call → foods[], portionGrams, portionLabel, per100g</a:t>
+              <a:t>dish classifier (2,024 foods) + SSD box detector (counts items)</a:t>
             </a:r>
             <a:endParaRPr lang="en-US" sz="1150" dirty="0"/>
           </a:p>
@@ -2348,7 +2497,7 @@
                 <a:ea typeface="Segoe UI" pitchFamily="34" charset="-122"/>
                 <a:cs typeface="Segoe UI" pitchFamily="34" charset="-120"/>
               </a:rPr>
-              <a:t>analyzeFoodImageGemini() + nutritionFromGemini()</a:t>
+              <a:t>classifyFoodLocal() + detectFoodBoxes() via react-native-fast-tflite (JSI)</a:t>
             </a:r>
             <a:endParaRPr lang="en-US" sz="1150" dirty="0"/>
           </a:p>
@@ -2369,7 +2518,7 @@
                 <a:ea typeface="Segoe UI" pitchFamily="34" charset="-122"/>
                 <a:cs typeface="Segoe UI" pitchFamily="34" charset="-120"/>
               </a:rPr>
-              <a:t>Model: gemini-flash-latest</a:t>
+              <a:t>Runs offline — the image never leaves the phone</a:t>
             </a:r>
             <a:endParaRPr lang="en-US" sz="1150" dirty="0"/>
           </a:p>
@@ -2524,7 +2673,7 @@
                 <a:ea typeface="Segoe UI" pitchFamily="34" charset="-122"/>
                 <a:cs typeface="Segoe UI" pitchFamily="34" charset="-120"/>
               </a:rPr>
-              <a:t>App.js onScan() = Gemini-first</a:t>
+              <a:t>App.js onScan() = on-device only</a:t>
             </a:r>
             <a:endParaRPr lang="en-US" sz="1150" dirty="0"/>
           </a:p>
@@ -2566,7 +2715,7 @@
                 <a:ea typeface="Segoe UI" pitchFamily="34" charset="-122"/>
                 <a:cs typeface="Segoe UI" pitchFamily="34" charset="-120"/>
               </a:rPr>
-              <a:t>USDA / offline / Gemini fallbacks</a:t>
+              <a:t>Offline nutrition table (~70 foods) + fuzzy match</a:t>
             </a:r>
             <a:endParaRPr lang="en-US" sz="1150" dirty="0"/>
           </a:p>
@@ -2587,7 +2736,7 @@
                 <a:ea typeface="Segoe UI" pitchFamily="34" charset="-122"/>
                 <a:cs typeface="Segoe UI" pitchFamily="34" charset="-120"/>
               </a:rPr>
-              <a:t>Surfaces real error reason</a:t>
+              <a:t>Unknown foods still shown, with confidence</a:t>
             </a:r>
             <a:endParaRPr lang="en-US" sz="1150" dirty="0"/>
           </a:p>
@@ -2784,7 +2933,7 @@
                 <a:ea typeface="Segoe UI" pitchFamily="34" charset="-122"/>
                 <a:cs typeface="Segoe UI" pitchFamily="34" charset="-120"/>
               </a:rPr>
-              <a:t>Details: "Portion (estimated)" section</a:t>
+              <a:t>Details: scanned photo + counted items</a:t>
             </a:r>
             <a:endParaRPr lang="en-US" sz="1150" dirty="0"/>
           </a:p>
@@ -2805,7 +2954,7 @@
                 <a:ea typeface="Segoe UI" pitchFamily="34" charset="-122"/>
                 <a:cs typeface="Segoe UI" pitchFamily="34" charset="-120"/>
               </a:rPr>
-              <a:t>Shows Recognized by: Gemini</a:t>
+              <a:t>Shows Recognized by: On-device AI (xx%)</a:t>
             </a:r>
             <a:endParaRPr lang="en-US" sz="1150" dirty="0"/>
           </a:p>
@@ -2917,7 +3066,7 @@
                 <a:ea typeface="Segoe UI" pitchFamily="34" charset="-122"/>
                 <a:cs typeface="Segoe UI" pitchFamily="34" charset="-120"/>
               </a:rPr>
-              <a:t>API keys</a:t>
+              <a:t>Privacy hardening</a:t>
             </a:r>
             <a:endParaRPr lang="en-US" sz="1400" dirty="0"/>
           </a:p>
@@ -2960,7 +3109,7 @@
                 <a:ea typeface="Segoe UI" pitchFamily="34" charset="-122"/>
                 <a:cs typeface="Segoe UI" pitchFamily="34" charset="-120"/>
               </a:rPr>
-              <a:t>GEMINI_API_KEY added &amp; wired</a:t>
+              <a:t>Gemini &amp; Google Vision code paths deleted</a:t>
             </a:r>
             <a:endParaRPr lang="en-US" sz="1150" dirty="0"/>
           </a:p>
@@ -2981,7 +3130,7 @@
                 <a:ea typeface="Segoe UI" pitchFamily="34" charset="-122"/>
                 <a:cs typeface="Segoe UI" pitchFamily="34" charset="-120"/>
               </a:rPr>
-              <a:t>Verified live against Gemini API</a:t>
+              <a:t>SCAN makes zero network calls</a:t>
             </a:r>
             <a:endParaRPr lang="en-US" sz="1150" dirty="0"/>
           </a:p>
@@ -3002,7 +3151,7 @@
                 <a:ea typeface="Segoe UI" pitchFamily="34" charset="-122"/>
                 <a:cs typeface="Segoe UI" pitchFamily="34" charset="-120"/>
               </a:rPr>
-              <a:t>USDA key active</a:t>
+              <a:t>USDA only for typed text lookups (PICK)</a:t>
             </a:r>
             <a:endParaRPr lang="en-US" sz="1150" dirty="0"/>
           </a:p>
@@ -3157,7 +3306,7 @@
                 <a:ea typeface="Segoe UI" pitchFamily="34" charset="-122"/>
                 <a:cs typeface="Segoe UI" pitchFamily="34" charset="-120"/>
               </a:rPr>
-              <a:t>react-native-image-picker</a:t>
+              <a:t>react-native-fast-tflite + jpeg-js</a:t>
             </a:r>
             <a:endParaRPr lang="en-US" sz="1150" dirty="0"/>
           </a:p>
@@ -3178,7 +3327,7 @@
                 <a:ea typeface="Segoe UI" pitchFamily="34" charset="-122"/>
                 <a:cs typeface="Segoe UI" pitchFamily="34" charset="-120"/>
               </a:rPr>
-              <a:t>Reliable camera still capture</a:t>
+              <a:t>Fast JSI inference + on-device JPEG decode</a:t>
             </a:r>
             <a:endParaRPr lang="en-US" sz="1150" dirty="0"/>
           </a:p>
@@ -3739,7 +3888,7 @@
                 <a:ea typeface="Segoe UI" pitchFamily="34" charset="-122"/>
                 <a:cs typeface="Segoe UI" pitchFamily="34" charset="-120"/>
               </a:rPr>
-              <a:t>2 · Gemini</a:t>
+              <a:t>2 · On-device AI</a:t>
             </a:r>
             <a:endParaRPr lang="en-US" sz="1400" dirty="0"/>
           </a:p>
@@ -3778,7 +3927,7 @@
                 <a:ea typeface="Segoe UI" pitchFamily="34" charset="-122"/>
                 <a:cs typeface="Segoe UI" pitchFamily="34" charset="-120"/>
               </a:rPr>
-              <a:t>Recognize food</a:t>
+              <a:t>classifier names dish</a:t>
             </a:r>
             <a:endParaRPr lang="en-US" sz="1050" dirty="0"/>
           </a:p>
@@ -3795,7 +3944,7 @@
                 <a:ea typeface="Segoe UI" pitchFamily="34" charset="-122"/>
                 <a:cs typeface="Segoe UI" pitchFamily="34" charset="-120"/>
               </a:rPr>
-              <a:t>+ portion + macros</a:t>
+              <a:t>detector counts items</a:t>
             </a:r>
             <a:endParaRPr lang="en-US" sz="1050" dirty="0"/>
           </a:p>
@@ -3904,7 +4053,7 @@
                 <a:ea typeface="Segoe UI" pitchFamily="34" charset="-122"/>
                 <a:cs typeface="Segoe UI" pitchFamily="34" charset="-120"/>
               </a:rPr>
-              <a:t>3 · USDA</a:t>
+              <a:t>3 · Offline table</a:t>
             </a:r>
             <a:endParaRPr lang="en-US" sz="1400" dirty="0"/>
           </a:p>
@@ -3943,7 +4092,7 @@
                 <a:ea typeface="Segoe UI" pitchFamily="34" charset="-122"/>
                 <a:cs typeface="Segoe UI" pitchFamily="34" charset="-120"/>
               </a:rPr>
-              <a:t>Authoritative</a:t>
+              <a:t>per-100g macros</a:t>
             </a:r>
             <a:endParaRPr lang="en-US" sz="1050" dirty="0"/>
           </a:p>
@@ -3960,7 +4109,7 @@
                 <a:ea typeface="Segoe UI" pitchFamily="34" charset="-122"/>
                 <a:cs typeface="Segoe UI" pitchFamily="34" charset="-120"/>
               </a:rPr>
-              <a:t>per-100g macros</a:t>
+              <a:t>+ typical serving</a:t>
             </a:r>
             <a:endParaRPr lang="en-US" sz="1050" dirty="0"/>
           </a:p>
@@ -4355,7 +4504,7 @@
                 <a:ea typeface="Segoe UI" pitchFamily="34" charset="-122"/>
                 <a:cs typeface="Segoe UI" pitchFamily="34" charset="-120"/>
               </a:rPr>
-              <a:t>Gemini fails / no food  →  Google Vision labels (note: currently disabled — billing off on its GCP project).</a:t>
+              <a:t>Food not in the offline table → shown as UNKNOWN with a one-tap USDA text search (name only).</a:t>
             </a:r>
             <a:endParaRPr lang="en-US" sz="1300" dirty="0"/>
           </a:p>
@@ -4376,7 +4525,7 @@
                 <a:ea typeface="Segoe UI" pitchFamily="34" charset="-122"/>
                 <a:cs typeface="Segoe UI" pitchFamily="34" charset="-120"/>
               </a:rPr>
-              <a:t>Portion (grams + per-portion kcal) is attached only on the Gemini path.</a:t>
+              <a:t>Portion = typical serving × detected item count; AR-geometry grams estimation is in progress.</a:t>
             </a:r>
             <a:endParaRPr lang="en-US" sz="1300" dirty="0"/>
           </a:p>
@@ -4723,7 +4872,7 @@
                 <a:ea typeface="Segoe UI" pitchFamily="34" charset="-122"/>
                 <a:cs typeface="Segoe UI" pitchFamily="34" charset="-120"/>
               </a:rPr>
-              <a:t>Every scan returned "Gemini detected no food".</a:t>
+              <a:t>Meal photos were uploaded to Google servers for recognition.</a:t>
             </a:r>
             <a:endParaRPr lang="en-US" sz="1250" dirty="0"/>
           </a:p>
@@ -4744,7 +4893,7 @@
                 <a:ea typeface="Segoe UI" pitchFamily="34" charset="-122"/>
                 <a:cs typeface="Segoe UI" pitchFamily="34" charset="-120"/>
               </a:rPr>
-              <a:t>AR screenshot came back fully black.</a:t>
+              <a:t>A privacy risk for users and for human-subjects research (Goal 3).</a:t>
             </a:r>
             <a:endParaRPr lang="en-US" sz="1250" dirty="0"/>
           </a:p>
@@ -4765,7 +4914,7 @@
                 <a:ea typeface="Segoe UI" pitchFamily="34" charset="-122"/>
                 <a:cs typeface="Segoe UI" pitchFamily="34" charset="-120"/>
               </a:rPr>
-              <a:t>Fell through to Vision → HTTP 403.</a:t>
+              <a:t>Cloud dependence: no offline use; API rate limits.</a:t>
             </a:r>
             <a:endParaRPr lang="en-US" sz="1250" dirty="0"/>
           </a:p>
@@ -4881,7 +5030,7 @@
                 <a:ea typeface="Segoe UI" pitchFamily="34" charset="-122"/>
                 <a:cs typeface="Segoe UI" pitchFamily="34" charset="-120"/>
               </a:rPr>
-              <a:t>Viro renders the camera to a GL SurfaceView.</a:t>
+              <a:t>Recognition ran in the cloud (Gemini multimodal).</a:t>
             </a:r>
             <a:endParaRPr lang="en-US" sz="1250" dirty="0"/>
           </a:p>
@@ -4902,7 +5051,7 @@
                 <a:ea typeface="Segoe UI" pitchFamily="34" charset="-122"/>
                 <a:cs typeface="Segoe UI" pitchFamily="34" charset="-120"/>
               </a:rPr>
-              <a:t>view-shot / captureRef can't read it → black frame.</a:t>
+              <a:t>Every scan meant an image upload to external servers.</a:t>
             </a:r>
             <a:endParaRPr lang="en-US" sz="1250" dirty="0"/>
           </a:p>
@@ -4923,7 +5072,7 @@
                 <a:ea typeface="Segoe UI" pitchFamily="34" charset="-122"/>
                 <a:cs typeface="Segoe UI" pitchFamily="34" charset="-120"/>
               </a:rPr>
-              <a:t>Viro takeScreenshot needs WRITE_EXTERNAL_STORAGE — ungrantable on Android 13+ (errorCode 1).</a:t>
+              <a:t>Privacy/IRB expectations require meal images to stay on the device.</a:t>
             </a:r>
             <a:endParaRPr lang="en-US" sz="1250" dirty="0"/>
           </a:p>
@@ -5039,7 +5188,7 @@
                 <a:ea typeface="Segoe UI" pitchFamily="34" charset="-122"/>
                 <a:cs typeface="Segoe UI" pitchFamily="34" charset="-120"/>
               </a:rPr>
-              <a:t>Capture a real photo with the device camera (react-native-image-picker launchCamera) instead of screenshotting the GL surface.</a:t>
+              <a:t>Replaced cloud AI with two local TFLite models (dish classifier + box detector) running on the phone via JSI.</a:t>
             </a:r>
             <a:endParaRPr lang="en-US" sz="1350" dirty="0"/>
           </a:p>
@@ -5060,7 +5209,7 @@
                 <a:ea typeface="Segoe UI" pitchFamily="34" charset="-122"/>
                 <a:cs typeface="Segoe UI" pitchFamily="34" charset="-120"/>
               </a:rPr>
-              <a:t>ARCore pauses while the camera intent is up, then resumes — no camera contention.</a:t>
+              <a:t>All cloud-vision code deleted — SCAN works in airplane mode.</a:t>
             </a:r>
             <a:endParaRPr lang="en-US" sz="1350" dirty="0"/>
           </a:p>
@@ -5081,7 +5230,7 @@
                 <a:ea typeface="Segoe UI" pitchFamily="34" charset="-122"/>
                 <a:cs typeface="Segoe UI" pitchFamily="34" charset="-120"/>
               </a:rPr>
-              <a:t>Gemini now receives a clear photo → accurate recognition, portion and nutrition.</a:t>
+              <a:t>Photos stay in app-private storage — nothing ever leaves the phone.</a:t>
             </a:r>
             <a:endParaRPr lang="en-US" sz="1350" dirty="0"/>
           </a:p>
@@ -5387,7 +5536,7 @@
                 <a:ea typeface="Segoe UI" pitchFamily="34" charset="-122"/>
                 <a:cs typeface="Segoe UI" pitchFamily="34" charset="-120"/>
               </a:rPr>
-              <a:t>Gemini API verified live (recognition + structured JSON + portion + macros).</a:t>
+              <a:t>Both TFLite models verified live on-device (192×192 classifier · SSD box detector).</a:t>
             </a:r>
             <a:endParaRPr lang="en-US" sz="1400" dirty="0"/>
           </a:p>
@@ -5408,7 +5557,7 @@
                 <a:ea typeface="Segoe UI" pitchFamily="34" charset="-122"/>
                 <a:cs typeface="Segoe UI" pitchFamily="34" charset="-120"/>
               </a:rPr>
-              <a:t>Live scan of a mandarin returned a complete, sensible result:</a:t>
+              <a:t>Live scan returns recognition + portion + GI + risk — fully offline:</a:t>
             </a:r>
             <a:endParaRPr lang="en-US" sz="1400" dirty="0"/>
           </a:p>
@@ -5520,7 +5669,7 @@
                 <a:ea typeface="Segoe UI" pitchFamily="34" charset="-122"/>
                 <a:cs typeface="Segoe UI" pitchFamily="34" charset="-120"/>
               </a:rPr>
-              <a:t>mandarin</a:t>
+              <a:t>3 × apple</a:t>
             </a:r>
             <a:endParaRPr lang="en-US" sz="2600" dirty="0"/>
           </a:p>
@@ -5559,7 +5708,7 @@
                 <a:ea typeface="Segoe UI" pitchFamily="34" charset="-122"/>
                 <a:cs typeface="Segoe UI" pitchFamily="34" charset="-120"/>
               </a:rPr>
-              <a:t>46 kcal</a:t>
+              <a:t>284 kcal</a:t>
             </a:r>
             <a:r>
               <a:rPr lang="en-US" sz="1300" dirty="0">
@@ -5581,7 +5730,7 @@
                 <a:ea typeface="Segoe UI" pitchFamily="34" charset="-122"/>
                 <a:cs typeface="Segoe UI" pitchFamily="34" charset="-120"/>
               </a:rPr>
-              <a:t>80 g portion</a:t>
+              <a:t>546 g portion</a:t>
             </a:r>
             <a:endParaRPr lang="en-US" sz="1800" dirty="0"/>
           </a:p>
@@ -5620,7 +5769,7 @@
                 <a:ea typeface="Segoe UI" pitchFamily="34" charset="-122"/>
                 <a:cs typeface="Segoe UI" pitchFamily="34" charset="-120"/>
               </a:rPr>
-              <a:t>GI 43</a:t>
+              <a:t>GI 36</a:t>
             </a:r>
             <a:r>
               <a:rPr lang="en-US" sz="1200" dirty="0">
@@ -5842,6 +5991,409 @@
 </file>
 
 <file path=ppt/slides/slide7.xml><?xml version="1.0" encoding="utf-8"?>
+<p:sld xmlns:a="http://schemas.openxmlformats.org/drawingml/2006/main" xmlns:r="http://schemas.openxmlformats.org/officeDocument/2006/relationships" xmlns:p="http://schemas.openxmlformats.org/presentationml/2006/main">
+  <p:cSld name="Live Screenshots">
+    <p:bg>
+      <p:bgPr>
+        <a:solidFill>
+          <a:srgbClr val="F4F6FA"/>
+        </a:solidFill>
+        <a:effectLst/>
+      </p:bgPr>
+    </p:bg>
+    <p:spTree>
+      <p:nvGrpSpPr>
+        <p:cNvPr id="1" name=""/>
+        <p:cNvGrpSpPr/>
+        <p:nvPr/>
+      </p:nvGrpSpPr>
+      <p:grpSpPr>
+        <a:xfrm>
+          <a:off x="0" y="0"/>
+          <a:ext cx="0" cy="0"/>
+          <a:chOff x="0" y="0"/>
+          <a:chExt cx="0" cy="0"/>
+        </a:xfrm>
+      </p:grpSpPr>
+      <p:sp>
+        <p:nvSpPr>
+          <p:cNvPr id="2" name="Shape 0"/>
+          <p:cNvSpPr/>
+          <p:nvPr/>
+        </p:nvSpPr>
+        <p:spPr>
+          <a:xfrm>
+            <a:off x="0" y="0"/>
+            <a:ext cx="12188952" cy="1051560"/>
+          </a:xfrm>
+          <a:prstGeom prst="rect">
+            <a:avLst/>
+          </a:prstGeom>
+          <a:solidFill>
+            <a:srgbClr val="0F2440"/>
+          </a:solidFill>
+          <a:ln w="12700">
+            <a:solidFill>
+              <a:srgbClr val="0F2440"/>
+            </a:solidFill>
+            <a:prstDash val="solid"/>
+          </a:ln>
+        </p:spPr>
+        <p:txBody>
+          <a:bodyPr/>
+          <a:lstStyle/>
+          <a:p>
+            <a:endParaRPr lang="en-US"/>
+          </a:p>
+        </p:txBody>
+      </p:sp>
+      <p:sp>
+        <p:nvSpPr>
+          <p:cNvPr id="3" name="Shape 1"/>
+          <p:cNvSpPr/>
+          <p:nvPr/>
+        </p:nvSpPr>
+        <p:spPr>
+          <a:xfrm>
+            <a:off x="0" y="1051560"/>
+            <a:ext cx="12188952" cy="54864"/>
+          </a:xfrm>
+          <a:prstGeom prst="rect">
+            <a:avLst/>
+          </a:prstGeom>
+          <a:solidFill>
+            <a:srgbClr val="2E7BFF"/>
+          </a:solidFill>
+          <a:ln w="12700">
+            <a:solidFill>
+              <a:srgbClr val="2E7BFF"/>
+            </a:solidFill>
+            <a:prstDash val="solid"/>
+          </a:ln>
+        </p:spPr>
+        <p:txBody>
+          <a:bodyPr/>
+          <a:lstStyle/>
+          <a:p>
+            <a:endParaRPr lang="en-US"/>
+          </a:p>
+        </p:txBody>
+      </p:sp>
+      <p:sp>
+        <p:nvSpPr>
+          <p:cNvPr id="4" name="Text 2"/>
+          <p:cNvSpPr/>
+          <p:nvPr/>
+        </p:nvSpPr>
+        <p:spPr>
+          <a:xfrm>
+            <a:off x="548640" y="146304"/>
+            <a:ext cx="10972800" cy="274320"/>
+          </a:xfrm>
+          <a:prstGeom prst="rect">
+            <a:avLst/>
+          </a:prstGeom>
+          <a:noFill/>
+          <a:ln/>
+        </p:spPr>
+        <p:txBody>
+          <a:bodyPr wrap="square" rtlCol="0" anchor="ctr"/>
+          <a:lstStyle/>
+          <a:p>
+            <a:pPr marL="0" indent="0">
+              <a:buNone/>
+            </a:pPr>
+            <a:r>
+              <a:rPr lang="en-US" sz="1100" b="1" kern="0" spc="200" dirty="0">
+                <a:solidFill>
+                  <a:srgbClr val="12B5A5"/>
+                </a:solidFill>
+                <a:latin typeface="Segoe UI" pitchFamily="34" charset="0"/>
+                <a:ea typeface="Segoe UI" pitchFamily="34" charset="-122"/>
+                <a:cs typeface="Segoe UI" pitchFamily="34" charset="-120"/>
+              </a:rPr>
+              <a:t>LIVE RESULTS</a:t>
+            </a:r>
+            <a:endParaRPr lang="en-US" sz="1100" dirty="0"/>
+          </a:p>
+        </p:txBody>
+      </p:sp>
+      <p:sp>
+        <p:nvSpPr>
+          <p:cNvPr id="5" name="Text 3"/>
+          <p:cNvSpPr/>
+          <p:nvPr/>
+        </p:nvSpPr>
+        <p:spPr>
+          <a:xfrm>
+            <a:off x="548640" y="384048"/>
+            <a:ext cx="11064240" cy="603504"/>
+          </a:xfrm>
+          <a:prstGeom prst="rect">
+            <a:avLst/>
+          </a:prstGeom>
+          <a:noFill/>
+          <a:ln/>
+        </p:spPr>
+        <p:txBody>
+          <a:bodyPr wrap="square" rtlCol="0" anchor="ctr"/>
+          <a:lstStyle/>
+          <a:p>
+            <a:pPr marL="0" indent="0">
+              <a:buNone/>
+            </a:pPr>
+            <a:r>
+              <a:rPr lang="en-US" sz="2600" b="1" dirty="0">
+                <a:solidFill>
+                  <a:srgbClr val="FFFFFF"/>
+                </a:solidFill>
+                <a:latin typeface="Segoe UI" pitchFamily="34" charset="0"/>
+                <a:ea typeface="Segoe UI" pitchFamily="34" charset="-122"/>
+                <a:cs typeface="Segoe UI" pitchFamily="34" charset="-120"/>
+              </a:rPr>
+              <a:t>On-Device Recognition in Action</a:t>
+            </a:r>
+            <a:endParaRPr lang="en-US" sz="2600" dirty="0"/>
+          </a:p>
+        </p:txBody>
+      </p:sp>
+      <p:pic>
+        <p:nvPicPr>
+          <p:cNvPr id="6" name="Screenshot Apples"/>
+          <p:cNvPicPr/>
+          <p:nvPr/>
+        </p:nvPicPr>
+        <p:blipFill>
+          <a:blip r:embed="rId2"/>
+          <a:stretch>
+            <a:fillRect/>
+          </a:stretch>
+        </p:blipFill>
+        <p:spPr>
+          <a:xfrm>
+            <a:off x="2392625" y="1252728"/>
+            <a:ext cx="2002250" cy="4480560"/>
+          </a:xfrm>
+          <a:prstGeom prst="roundRect">
+            <a:avLst>
+              <a:gd name="adj" fmla="val 4000"/>
+            </a:avLst>
+          </a:prstGeom>
+        </p:spPr>
+      </p:pic>
+      <p:pic>
+        <p:nvPicPr>
+          <p:cNvPr id="7" name="Screenshot Rye Bread"/>
+          <p:cNvPicPr/>
+          <p:nvPr/>
+        </p:nvPicPr>
+        <p:blipFill>
+          <a:blip r:embed="rId3"/>
+          <a:stretch>
+            <a:fillRect/>
+          </a:stretch>
+        </p:blipFill>
+        <p:spPr>
+          <a:xfrm>
+            <a:off x="5094875" y="1252728"/>
+            <a:ext cx="2002250" cy="4480560"/>
+          </a:xfrm>
+          <a:prstGeom prst="roundRect">
+            <a:avLst>
+              <a:gd name="adj" fmla="val 4000"/>
+            </a:avLst>
+          </a:prstGeom>
+        </p:spPr>
+      </p:pic>
+      <p:pic>
+        <p:nvPicPr>
+          <p:cNvPr id="8" name="Screenshot Unknown Food"/>
+          <p:cNvPicPr/>
+          <p:nvPr/>
+        </p:nvPicPr>
+        <p:blipFill>
+          <a:blip r:embed="rId4"/>
+          <a:stretch>
+            <a:fillRect/>
+          </a:stretch>
+        </p:blipFill>
+        <p:spPr>
+          <a:xfrm>
+            <a:off x="7797125" y="1252728"/>
+            <a:ext cx="2002250" cy="4480560"/>
+          </a:xfrm>
+          <a:prstGeom prst="roundRect">
+            <a:avLst>
+              <a:gd name="adj" fmla="val 4000"/>
+            </a:avLst>
+          </a:prstGeom>
+        </p:spPr>
+      </p:pic>
+      <p:sp>
+        <p:nvSpPr>
+          <p:cNvPr id="9" name="Caption 1"/>
+          <p:cNvSpPr/>
+          <p:nvPr/>
+        </p:nvSpPr>
+        <p:spPr>
+          <a:xfrm>
+            <a:off x="2092625" y="5794248"/>
+            <a:ext cx="2602250" cy="640080"/>
+          </a:xfrm>
+          <a:prstGeom prst="rect">
+            <a:avLst/>
+          </a:prstGeom>
+          <a:noFill/>
+          <a:ln/>
+        </p:spPr>
+        <p:txBody>
+          <a:bodyPr wrap="square" rtlCol="0" anchor="t"/>
+          <a:lstStyle/>
+          <a:p>
+            <a:pPr marL="0" indent="0" algn="ctr">
+              <a:buNone/>
+            </a:pPr>
+            <a:r>
+              <a:rPr lang="en-US" sz="1200" b="1" dirty="0">
+                <a:solidFill>
+                  <a:srgbClr val="1A1F29"/>
+                </a:solidFill>
+                <a:latin typeface="Segoe UI" pitchFamily="34" charset="0"/>
+                <a:ea typeface="Segoe UI" pitchFamily="34" charset="-122"/>
+                <a:cs typeface="Segoe UI" pitchFamily="34" charset="-120"/>
+              </a:rPr>
+              <a:t>3 × Apple — detector counts items (100%)</a:t>
+            </a:r>
+            <a:endParaRPr lang="en-US" sz="1200" dirty="0"/>
+          </a:p>
+        </p:txBody>
+      </p:sp>
+      <p:sp>
+        <p:nvSpPr>
+          <p:cNvPr id="10" name="Caption 2"/>
+          <p:cNvSpPr/>
+          <p:nvPr/>
+        </p:nvSpPr>
+        <p:spPr>
+          <a:xfrm>
+            <a:off x="4794875" y="5794248"/>
+            <a:ext cx="2602250" cy="640080"/>
+          </a:xfrm>
+          <a:prstGeom prst="rect">
+            <a:avLst/>
+          </a:prstGeom>
+          <a:noFill/>
+          <a:ln/>
+        </p:spPr>
+        <p:txBody>
+          <a:bodyPr wrap="square" rtlCol="0" anchor="t"/>
+          <a:lstStyle/>
+          <a:p>
+            <a:pPr marL="0" indent="0" algn="ctr">
+              <a:buNone/>
+            </a:pPr>
+            <a:r>
+              <a:rPr lang="en-US" sz="1200" b="1" dirty="0">
+                <a:solidFill>
+                  <a:srgbClr val="1A1F29"/>
+                </a:solidFill>
+                <a:latin typeface="Segoe UI" pitchFamily="34" charset="0"/>
+                <a:ea typeface="Segoe UI" pitchFamily="34" charset="-122"/>
+                <a:cs typeface="Segoe UI" pitchFamily="34" charset="-120"/>
+              </a:rPr>
+              <a:t>Rye bread— GI 75 risk flag</a:t>
+            </a:r>
+            <a:endParaRPr lang="en-US" sz="1200" dirty="0"/>
+          </a:p>
+        </p:txBody>
+      </p:sp>
+      <p:sp>
+        <p:nvSpPr>
+          <p:cNvPr id="11" name="Caption 3"/>
+          <p:cNvSpPr/>
+          <p:nvPr/>
+        </p:nvSpPr>
+        <p:spPr>
+          <a:xfrm>
+            <a:off x="7497125" y="5794248"/>
+            <a:ext cx="2602250" cy="640080"/>
+          </a:xfrm>
+          <a:prstGeom prst="rect">
+            <a:avLst/>
+          </a:prstGeom>
+          <a:noFill/>
+          <a:ln/>
+        </p:spPr>
+        <p:txBody>
+          <a:bodyPr wrap="square" rtlCol="0" anchor="t"/>
+          <a:lstStyle/>
+          <a:p>
+            <a:pPr marL="0" indent="0" algn="ctr">
+              <a:buNone/>
+            </a:pPr>
+            <a:r>
+              <a:rPr lang="en-US" sz="1200" b="1" dirty="0">
+                <a:solidFill>
+                  <a:srgbClr val="1A1F29"/>
+                </a:solidFill>
+                <a:latin typeface="Segoe UI" pitchFamily="34" charset="0"/>
+                <a:ea typeface="Segoe UI" pitchFamily="34" charset="-122"/>
+                <a:cs typeface="Segoe UI" pitchFamily="34" charset="-120"/>
+              </a:rPr>
+              <a:t>Out-of-vocabulary → UNKNOWN</a:t>
+            </a:r>
+            <a:endParaRPr lang="en-US" sz="1200" dirty="0"/>
+          </a:p>
+        </p:txBody>
+      </p:sp>
+      <p:sp>
+        <p:nvSpPr>
+          <p:cNvPr id="12" name="Page"/>
+          <p:cNvSpPr/>
+          <p:nvPr/>
+        </p:nvSpPr>
+        <p:spPr>
+          <a:xfrm>
+            <a:off x="11338560" y="6446520"/>
+            <a:ext cx="457200" cy="274320"/>
+          </a:xfrm>
+          <a:prstGeom prst="rect">
+            <a:avLst/>
+          </a:prstGeom>
+          <a:noFill/>
+          <a:ln/>
+        </p:spPr>
+        <p:txBody>
+          <a:bodyPr wrap="square" rtlCol="0" anchor="ctr"/>
+          <a:lstStyle/>
+          <a:p>
+            <a:pPr marL="0" indent="0" algn="r">
+              <a:buNone/>
+            </a:pPr>
+            <a:r>
+              <a:rPr lang="en-US" sz="900" dirty="0">
+                <a:solidFill>
+                  <a:srgbClr val="5A6472"/>
+                </a:solidFill>
+                <a:latin typeface="Segoe UI" pitchFamily="34" charset="0"/>
+                <a:ea typeface="Segoe UI" pitchFamily="34" charset="-122"/>
+                <a:cs typeface="Segoe UI" pitchFamily="34" charset="-120"/>
+              </a:rPr>
+              <a:t>6b</a:t>
+            </a:r>
+            <a:endParaRPr lang="en-US" sz="900" dirty="0"/>
+          </a:p>
+        </p:txBody>
+      </p:sp>
+    </p:spTree>
+  </p:cSld>
+  <p:clrMapOvr>
+    <a:masterClrMapping/>
+  </p:clrMapOvr>
+</p:sld>
+</file>
+
+<file path=ppt/slides/slide8.xml><?xml version="1.0" encoding="utf-8"?>
 <p:sld xmlns:a="http://schemas.openxmlformats.org/drawingml/2006/main" xmlns:r="http://schemas.openxmlformats.org/officeDocument/2006/relationships" xmlns:p="http://schemas.openxmlformats.org/presentationml/2006/main">
   <p:cSld>
     <p:spTree>
@@ -5886,8 +6438,8 @@
         </p:blipFill>
         <p:spPr>
           <a:xfrm>
-            <a:off x="2046849" y="0"/>
-            <a:ext cx="3478365" cy="6858000"/>
+            <a:off x="1962873" y="587829"/>
+            <a:ext cx="3478365" cy="5299788"/>
           </a:xfrm>
           <a:prstGeom prst="rect">
             <a:avLst/>
@@ -5922,14 +6474,49 @@
         </p:blipFill>
         <p:spPr>
           <a:xfrm>
-            <a:off x="6417213" y="0"/>
-            <a:ext cx="3959050" cy="6858000"/>
+            <a:off x="6417213" y="587828"/>
+            <a:ext cx="3959050" cy="5299789"/>
           </a:xfrm>
           <a:prstGeom prst="rect">
             <a:avLst/>
           </a:prstGeom>
         </p:spPr>
       </p:pic>
+      <p:sp>
+        <p:nvSpPr>
+          <p:cNvPr id="4" name="TextBox 3">
+            <a:extLst>
+              <a:ext uri="{FF2B5EF4-FFF2-40B4-BE49-F238E27FC236}">
+                <a16:creationId xmlns:a16="http://schemas.microsoft.com/office/drawing/2014/main" id="{7E16BC5C-A907-B397-9EE7-911E976D53EB}"/>
+              </a:ext>
+            </a:extLst>
+          </p:cNvPr>
+          <p:cNvSpPr txBox="1"/>
+          <p:nvPr/>
+        </p:nvSpPr>
+        <p:spPr>
+          <a:xfrm>
+            <a:off x="136431" y="83976"/>
+            <a:ext cx="1679306" cy="369332"/>
+          </a:xfrm>
+          <a:prstGeom prst="rect">
+            <a:avLst/>
+          </a:prstGeom>
+          <a:noFill/>
+        </p:spPr>
+        <p:txBody>
+          <a:bodyPr wrap="none" rtlCol="0">
+            <a:spAutoFit/>
+          </a:bodyPr>
+          <a:lstStyle/>
+          <a:p>
+            <a:r>
+              <a:rPr lang="en-US" dirty="0"/>
+              <a:t>Previous output</a:t>
+            </a:r>
+          </a:p>
+        </p:txBody>
+      </p:sp>
     </p:spTree>
     <p:extLst>
       <p:ext uri="{BB962C8B-B14F-4D97-AF65-F5344CB8AC3E}">
@@ -5943,7 +6530,7 @@
 </p:sld>
 </file>
 
-<file path=ppt/slides/slide8.xml><?xml version="1.0" encoding="utf-8"?>
+<file path=ppt/slides/slide9.xml><?xml version="1.0" encoding="utf-8"?>
 <p:sld xmlns:a="http://schemas.openxmlformats.org/drawingml/2006/main" xmlns:r="http://schemas.openxmlformats.org/officeDocument/2006/relationships" xmlns:p="http://schemas.openxmlformats.org/presentationml/2006/main">
   <p:cSld name="Slide 7">
     <p:bg>
@@ -6259,7 +6846,7 @@
                 <a:ea typeface="Segoe UI" pitchFamily="34" charset="-122"/>
                 <a:cs typeface="Segoe UI" pitchFamily="34" charset="-120"/>
               </a:rPr>
-              <a:t>Google Vision fallback disabled (billing off on its GCP project) — Gemini is the working path.</a:t>
+              <a:t>Classifier vocabulary = 2,024 prepared dishes; loose packaged snacks (e.g., peanuts in a container) are out-of-vocabulary.</a:t>
             </a:r>
             <a:endParaRPr lang="en-US" sz="1150" dirty="0"/>
           </a:p>
@@ -6280,7 +6867,7 @@
                 <a:ea typeface="Segoe UI" pitchFamily="34" charset="-122"/>
                 <a:cs typeface="Segoe UI" pitchFamily="34" charset="-120"/>
               </a:rPr>
-              <a:t>Gemini free-tier rate limits: rapid scans can briefly 429 (auto-retry / rescan).</a:t>
+              <a:t>Box detector counts 15 food types (fruits, bread, pizza…) — counting is limited to those.</a:t>
             </a:r>
             <a:endParaRPr lang="en-US" sz="1150" dirty="0"/>
           </a:p>
@@ -6540,7 +7127,7 @@
                 <a:ea typeface="Segoe UI" pitchFamily="34" charset="-122"/>
                 <a:cs typeface="Segoe UI" pitchFamily="34" charset="-120"/>
               </a:rPr>
-              <a:t>Portion estimation on the PICK path too.</a:t>
+              <a:t>AR-geometry portion estimation (box size × plane distance → grams).</a:t>
             </a:r>
             <a:endParaRPr lang="en-US" sz="1150" dirty="0"/>
           </a:p>
@@ -6582,7 +7169,7 @@
                 <a:ea typeface="Segoe UI" pitchFamily="34" charset="-122"/>
                 <a:cs typeface="Segoe UI" pitchFamily="34" charset="-120"/>
               </a:rPr>
-              <a:t>Optional: enable billing to restore Vision as a true fallback.</a:t>
+              <a:t>Fine-tune a detector on a broader food set (incl. snacks &amp; packaged foods).</a:t>
             </a:r>
             <a:endParaRPr lang="en-US" sz="1150" dirty="0"/>
           </a:p>
@@ -6673,176 +7260,6 @@
               <a:t>7</a:t>
             </a:r>
             <a:endParaRPr lang="en-US" sz="900" dirty="0"/>
-          </a:p>
-        </p:txBody>
-      </p:sp>
-    </p:spTree>
-  </p:cSld>
-  <p:clrMapOvr>
-    <a:masterClrMapping/>
-  </p:clrMapOvr>
-</p:sld>
-</file>
-
-<file path=ppt/slides/slide9.xml><?xml version="1.0" encoding="utf-8"?>
-<p:sld xmlns:a="http://schemas.openxmlformats.org/drawingml/2006/main" xmlns:r="http://schemas.openxmlformats.org/officeDocument/2006/relationships" xmlns:p="http://schemas.openxmlformats.org/presentationml/2006/main">
-  <p:cSld name="Slide 8">
-    <p:bg>
-      <p:bgPr>
-        <a:solidFill>
-          <a:srgbClr val="0F2440"/>
-        </a:solidFill>
-        <a:effectLst/>
-      </p:bgPr>
-    </p:bg>
-    <p:spTree>
-      <p:nvGrpSpPr>
-        <p:cNvPr id="1" name=""/>
-        <p:cNvGrpSpPr/>
-        <p:nvPr/>
-      </p:nvGrpSpPr>
-      <p:grpSpPr>
-        <a:xfrm>
-          <a:off x="0" y="0"/>
-          <a:ext cx="0" cy="0"/>
-          <a:chOff x="0" y="0"/>
-          <a:chExt cx="0" cy="0"/>
-        </a:xfrm>
-      </p:grpSpPr>
-      <p:sp>
-        <p:nvSpPr>
-          <p:cNvPr id="3" name="Text 1"/>
-          <p:cNvSpPr/>
-          <p:nvPr/>
-        </p:nvSpPr>
-        <p:spPr>
-          <a:xfrm>
-            <a:off x="731520" y="1371600"/>
-            <a:ext cx="10058400" cy="365760"/>
-          </a:xfrm>
-          <a:prstGeom prst="rect">
-            <a:avLst/>
-          </a:prstGeom>
-          <a:noFill/>
-          <a:ln/>
-        </p:spPr>
-        <p:txBody>
-          <a:bodyPr wrap="square" rtlCol="0" anchor="ctr"/>
-          <a:lstStyle/>
-          <a:p>
-            <a:pPr marL="0" indent="0">
-              <a:buNone/>
-            </a:pPr>
-            <a:r>
-              <a:rPr lang="en-US" sz="1400" b="1" kern="0" spc="300" dirty="0">
-                <a:solidFill>
-                  <a:srgbClr val="12B5A5"/>
-                </a:solidFill>
-                <a:latin typeface="Segoe UI" pitchFamily="34" charset="0"/>
-                <a:ea typeface="Segoe UI" pitchFamily="34" charset="-122"/>
-                <a:cs typeface="Segoe UI" pitchFamily="34" charset="-120"/>
-              </a:rPr>
-              <a:t>Summary</a:t>
-            </a:r>
-            <a:endParaRPr lang="en-US" sz="1400" dirty="0"/>
-          </a:p>
-        </p:txBody>
-      </p:sp>
-      <p:sp>
-        <p:nvSpPr>
-          <p:cNvPr id="4" name="Text 2"/>
-          <p:cNvSpPr/>
-          <p:nvPr/>
-        </p:nvSpPr>
-        <p:spPr>
-          <a:xfrm>
-            <a:off x="731520" y="1828800"/>
-            <a:ext cx="10607040" cy="1188720"/>
-          </a:xfrm>
-          <a:prstGeom prst="rect">
-            <a:avLst/>
-          </a:prstGeom>
-          <a:noFill/>
-          <a:ln/>
-        </p:spPr>
-        <p:txBody>
-          <a:bodyPr wrap="square" rtlCol="0" anchor="ctr"/>
-          <a:lstStyle/>
-          <a:p>
-            <a:pPr marL="0" indent="0">
-              <a:buNone/>
-            </a:pPr>
-            <a:endParaRPr lang="en-US" sz="2600" dirty="0"/>
-          </a:p>
-        </p:txBody>
-      </p:sp>
-      <p:sp>
-        <p:nvSpPr>
-          <p:cNvPr id="5" name="Text 3"/>
-          <p:cNvSpPr/>
-          <p:nvPr/>
-        </p:nvSpPr>
-        <p:spPr>
-          <a:xfrm>
-            <a:off x="762000" y="2011680"/>
-            <a:ext cx="10698480" cy="2011680"/>
-          </a:xfrm>
-          <a:prstGeom prst="rect">
-            <a:avLst/>
-          </a:prstGeom>
-          <a:noFill/>
-          <a:ln/>
-        </p:spPr>
-        <p:txBody>
-          <a:bodyPr wrap="square" rtlCol="0" anchor="t"/>
-          <a:lstStyle/>
-          <a:p>
-            <a:pPr marL="0" indent="0">
-              <a:spcAft>
-                <a:spcPts val="1000"/>
-              </a:spcAft>
-              <a:buNone/>
-            </a:pPr>
-            <a:r>
-              <a:rPr lang="en-US" sz="1500" dirty="0">
-                <a:solidFill>
-                  <a:srgbClr val="AEB9CC"/>
-                </a:solidFill>
-                <a:latin typeface="Segoe UI" pitchFamily="34" charset="0"/>
-                <a:ea typeface="Segoe UI" pitchFamily="34" charset="-122"/>
-                <a:cs typeface="Segoe UI" pitchFamily="34" charset="-120"/>
-              </a:rPr>
-              <a:t>Scan a meal  →  Gemini identifies it, estimates the portion, and computes nutrition  →  USDA refines macros  →  GI + risk  →  AR overlay.Delivered: GeminiVision service · reworked SCAN pipeline · reliable camera capture · portion shown across AR panel, bottom bar &amp; details.</a:t>
-            </a:r>
-            <a:endParaRPr lang="en-US" sz="1500" dirty="0"/>
-          </a:p>
-        </p:txBody>
-      </p:sp>
-      <p:sp>
-        <p:nvSpPr>
-          <p:cNvPr id="6" name="Text 4"/>
-          <p:cNvSpPr/>
-          <p:nvPr/>
-        </p:nvSpPr>
-        <p:spPr>
-          <a:xfrm>
-            <a:off x="731520" y="6126480"/>
-            <a:ext cx="10058400" cy="365760"/>
-          </a:xfrm>
-          <a:prstGeom prst="rect">
-            <a:avLst/>
-          </a:prstGeom>
-          <a:noFill/>
-          <a:ln/>
-        </p:spPr>
-        <p:txBody>
-          <a:bodyPr wrap="square" rtlCol="0" anchor="ctr"/>
-          <a:lstStyle/>
-          <a:p>
-            <a:pPr marL="0" indent="0">
-              <a:buNone/>
-            </a:pPr>
-            <a:endParaRPr lang="en-US" sz="1100" dirty="0"/>
           </a:p>
         </p:txBody>
       </p:sp>
